--- a/履歴書_PDF.pptx
+++ b/履歴書_PDF.pptx
@@ -172,7 +172,7 @@
           <a:p>
             <a:fld id="{1D8BD707-D9CF-40AE-B4C6-C98DA3205C09}" type="datetimeFigureOut">
               <a:rPr lang="en-US"/>
-              <a:t>10/6/2025</a:t>
+              <a:t>10/7/2025</a:t>
             </a:fld>
             <a:endParaRPr lang="en-US"/>
           </a:p>
@@ -337,7 +337,7 @@
           <a:p>
             <a:fld id="{1D8BD707-D9CF-40AE-B4C6-C98DA3205C09}" type="datetimeFigureOut">
               <a:rPr lang="en-US"/>
-              <a:t>10/6/2025</a:t>
+              <a:t>10/7/2025</a:t>
             </a:fld>
             <a:endParaRPr lang="en-US"/>
           </a:p>
@@ -545,7 +545,7 @@
           <a:p>
             <a:fld id="{1D8BD707-D9CF-40AE-B4C6-C98DA3205C09}" type="datetimeFigureOut">
               <a:rPr lang="en-US"/>
-              <a:t>10/6/2025</a:t>
+              <a:t>10/7/2025</a:t>
             </a:fld>
             <a:endParaRPr lang="en-US"/>
           </a:p>
@@ -687,7 +687,7 @@
           <a:p>
             <a:fld id="{1D8BD707-D9CF-40AE-B4C6-C98DA3205C09}" type="datetimeFigureOut">
               <a:rPr lang="en-US"/>
-              <a:t>10/6/2025</a:t>
+              <a:t>10/7/2025</a:t>
             </a:fld>
             <a:endParaRPr lang="en-US"/>
           </a:p>
@@ -806,7 +806,7 @@
           <a:p>
             <a:fld id="{1D8BD707-D9CF-40AE-B4C6-C98DA3205C09}" type="datetimeFigureOut">
               <a:rPr lang="en-US"/>
-              <a:t>10/6/2025</a:t>
+              <a:t>10/7/2025</a:t>
             </a:fld>
             <a:endParaRPr lang="en-US"/>
           </a:p>
@@ -3660,7 +3660,7 @@
           <a:p>
             <a:fld id="{1D8BD707-D9CF-40AE-B4C6-C98DA3205C09}" type="datetimeFigureOut">
               <a:rPr lang="en-US"/>
-              <a:t>10/6/2025</a:t>
+              <a:t>10/7/2025</a:t>
             </a:fld>
             <a:endParaRPr lang="en-US"/>
           </a:p>
@@ -3888,14 +3888,14 @@
           <p:nvPr>
             <p:extLst>
               <p:ext uri="{D42A27DB-BD31-4B8C-83A1-F6EECF244321}">
-                <p14:modId xmlns:p14="http://schemas.microsoft.com/office/powerpoint/2010/main" val="3691721643"/>
+                <p14:modId xmlns:p14="http://schemas.microsoft.com/office/powerpoint/2010/main" val="2780372615"/>
               </p:ext>
             </p:extLst>
           </p:nvPr>
         </p:nvGraphicFramePr>
         <p:xfrm>
           <a:off x="720083" y="408304"/>
-          <a:ext cx="5758176" cy="7622540"/>
+          <a:ext cx="5758176" cy="7675881"/>
         </p:xfrm>
         <a:graphic>
           <a:graphicData uri="http://schemas.openxmlformats.org/drawingml/2006/table">
@@ -4088,7 +4088,7 @@
                         </a:rPr>
                         <a:t>書</a:t>
                       </a:r>
-                      <a:endParaRPr sz="2400">
+                      <a:endParaRPr sz="2400" dirty="0">
                         <a:latin typeface="MS Gothic"/>
                         <a:cs typeface="MS Gothic"/>
                       </a:endParaRPr>
@@ -4393,7 +4393,7 @@
                           <a:spcPct val="100000"/>
                         </a:lnSpc>
                       </a:pPr>
-                      <a:endParaRPr sz="1000">
+                      <a:endParaRPr sz="1000" dirty="0">
                         <a:latin typeface="Times New Roman"/>
                         <a:cs typeface="Times New Roman"/>
                       </a:endParaRPr>
@@ -4418,7 +4418,7 @@
                           <a:spcPct val="100000"/>
                         </a:lnSpc>
                       </a:pPr>
-                      <a:endParaRPr sz="1000">
+                      <a:endParaRPr sz="1000" dirty="0">
                         <a:latin typeface="Times New Roman"/>
                         <a:cs typeface="Times New Roman"/>
                       </a:endParaRPr>
@@ -4443,7 +4443,7 @@
                           <a:spcPct val="100000"/>
                         </a:lnSpc>
                       </a:pPr>
-                      <a:endParaRPr sz="1000">
+                      <a:endParaRPr sz="1000" dirty="0">
                         <a:latin typeface="Times New Roman"/>
                         <a:cs typeface="Times New Roman"/>
                       </a:endParaRPr>
@@ -4471,7 +4471,7 @@
                           <a:spcPts val="110"/>
                         </a:spcBef>
                       </a:pPr>
-                      <a:endParaRPr sz="1050">
+                      <a:endParaRPr sz="1050" dirty="0">
                         <a:latin typeface="Times New Roman"/>
                         <a:cs typeface="Times New Roman"/>
                       </a:endParaRPr>
@@ -4482,14 +4482,7 @@
                           <a:spcPct val="100000"/>
                         </a:lnSpc>
                       </a:pPr>
-                      <a:r>
-                        <a:rPr sz="1050" spc="-20" dirty="0">
-                          <a:latin typeface="Century"/>
-                          <a:cs typeface="Century"/>
-                        </a:rPr>
-                        <a:t>2025</a:t>
-                      </a:r>
-                      <a:endParaRPr sz="1050">
+                      <a:endParaRPr sz="1050" dirty="0">
                         <a:latin typeface="Century"/>
                         <a:cs typeface="Century"/>
                       </a:endParaRPr>
@@ -4527,14 +4520,7 @@
                           <a:spcPts val="1255"/>
                         </a:spcBef>
                       </a:pPr>
-                      <a:r>
-                        <a:rPr sz="1100" b="1" spc="-50" dirty="0">
-                          <a:latin typeface="MS Mincho"/>
-                          <a:cs typeface="MS Mincho"/>
-                        </a:rPr>
-                        <a:t>年</a:t>
-                      </a:r>
-                      <a:endParaRPr sz="1100">
+                      <a:endParaRPr sz="1100" dirty="0">
                         <a:latin typeface="MS Mincho"/>
                         <a:cs typeface="MS Mincho"/>
                       </a:endParaRPr>
@@ -4573,13 +4559,6 @@
                           <a:spcPct val="100000"/>
                         </a:lnSpc>
                       </a:pPr>
-                      <a:r>
-                        <a:rPr lang="en-US" sz="1050" dirty="0">
-                          <a:latin typeface="Century"/>
-                          <a:cs typeface="Century"/>
-                        </a:rPr>
-                        <a:t>10</a:t>
-                      </a:r>
                       <a:endParaRPr sz="1050" dirty="0">
                         <a:latin typeface="Century"/>
                         <a:cs typeface="Century"/>
@@ -4608,13 +4587,6 @@
                           <a:spcPts val="1255"/>
                         </a:spcBef>
                       </a:pPr>
-                      <a:r>
-                        <a:rPr sz="1100" b="1" spc="-50" dirty="0">
-                          <a:latin typeface="MS Mincho"/>
-                          <a:cs typeface="MS Mincho"/>
-                        </a:rPr>
-                        <a:t>月</a:t>
-                      </a:r>
                       <a:endParaRPr sz="1100" dirty="0">
                         <a:latin typeface="MS Mincho"/>
                         <a:cs typeface="MS Mincho"/>
@@ -4664,13 +4636,6 @@
                           <a:spcPct val="100000"/>
                         </a:lnSpc>
                       </a:pPr>
-                      <a:r>
-                        <a:rPr sz="1050" spc="-50" dirty="0">
-                          <a:latin typeface="MS Gothic"/>
-                          <a:cs typeface="MS Gothic"/>
-                        </a:rPr>
-                        <a:t>４</a:t>
-                      </a:r>
                       <a:endParaRPr sz="1050" dirty="0">
                         <a:latin typeface="MS Gothic"/>
                         <a:cs typeface="MS Gothic"/>
@@ -4699,13 +4664,6 @@
                           <a:spcPts val="1255"/>
                         </a:spcBef>
                       </a:pPr>
-                      <a:r>
-                        <a:rPr sz="1100" b="1" spc="-20" dirty="0">
-                          <a:latin typeface="MS Mincho"/>
-                          <a:cs typeface="MS Mincho"/>
-                        </a:rPr>
-                        <a:t>日現在</a:t>
-                      </a:r>
                       <a:endParaRPr sz="1100" dirty="0">
                         <a:latin typeface="MS Mincho"/>
                         <a:cs typeface="MS Mincho"/>
@@ -4806,7 +4764,7 @@
                   </a:ext>
                 </a:extLst>
               </a:tr>
-              <a:tr h="278765">
+              <a:tr h="332106">
                 <a:tc>
                   <a:txBody>
                     <a:bodyPr/>
@@ -5042,7 +5000,7 @@
                           <a:spcPct val="100000"/>
                         </a:lnSpc>
                       </a:pPr>
-                      <a:endParaRPr sz="1000">
+                      <a:endParaRPr sz="1000" dirty="0">
                         <a:latin typeface="Times New Roman"/>
                         <a:cs typeface="Times New Roman"/>
                       </a:endParaRPr>
@@ -5104,7 +5062,7 @@
                           <a:spcPct val="100000"/>
                         </a:lnSpc>
                       </a:pPr>
-                      <a:endParaRPr sz="1000">
+                      <a:endParaRPr sz="1000" dirty="0">
                         <a:latin typeface="Times New Roman"/>
                         <a:cs typeface="Times New Roman"/>
                       </a:endParaRPr>
@@ -5145,7 +5103,7 @@
                           <a:spcPct val="100000"/>
                         </a:lnSpc>
                       </a:pPr>
-                      <a:endParaRPr sz="1000">
+                      <a:endParaRPr sz="1000" dirty="0">
                         <a:latin typeface="Times New Roman"/>
                         <a:cs typeface="Times New Roman"/>
                       </a:endParaRPr>
@@ -5176,7 +5134,7 @@
                           <a:spcPct val="100000"/>
                         </a:lnSpc>
                       </a:pPr>
-                      <a:endParaRPr sz="1000">
+                      <a:endParaRPr sz="1000" dirty="0">
                         <a:latin typeface="Times New Roman"/>
                         <a:cs typeface="Times New Roman"/>
                       </a:endParaRPr>
@@ -5576,7 +5534,7 @@
                           <a:spcPct val="100000"/>
                         </a:lnSpc>
                       </a:pPr>
-                      <a:endParaRPr sz="1000">
+                      <a:endParaRPr sz="1000" dirty="0">
                         <a:latin typeface="Times New Roman"/>
                         <a:cs typeface="Times New Roman"/>
                       </a:endParaRPr>
@@ -5856,7 +5814,7 @@
                         </a:rPr>
                         <a:t>柊一</a:t>
                       </a:r>
-                      <a:endParaRPr sz="2200">
+                      <a:endParaRPr sz="2200" dirty="0">
                         <a:latin typeface="MS Mincho"/>
                         <a:cs typeface="MS Mincho"/>
                       </a:endParaRPr>
@@ -6677,7 +6635,7 @@
                         </a:rPr>
                         <a:t>日生</a:t>
                       </a:r>
-                      <a:endParaRPr sz="1100">
+                      <a:endParaRPr sz="1100" dirty="0">
                         <a:latin typeface="MS Mincho"/>
                         <a:cs typeface="MS Mincho"/>
                       </a:endParaRPr>
@@ -6909,7 +6867,7 @@
                         </a:rPr>
                         <a:t>さがけんみやきぐんきやまちょうながの</a:t>
                       </a:r>
-                      <a:endParaRPr sz="1100">
+                      <a:endParaRPr sz="1100" dirty="0">
                         <a:latin typeface="MS Mincho"/>
                         <a:cs typeface="MS Mincho"/>
                       </a:endParaRPr>
@@ -7565,7 +7523,7 @@
                         </a:rPr>
                         <a:t>131</a:t>
                       </a:r>
-                      <a:endParaRPr sz="1100">
+                      <a:endParaRPr sz="1100" dirty="0">
                         <a:latin typeface="MS Mincho"/>
                         <a:cs typeface="MS Mincho"/>
                       </a:endParaRPr>
@@ -8696,6 +8654,24 @@
                           <a:spcPct val="100000"/>
                         </a:lnSpc>
                       </a:pPr>
+                      <a:endParaRPr sz="1000" dirty="0">
+                        <a:latin typeface="Times New Roman"/>
+                        <a:cs typeface="Times New Roman"/>
+                      </a:endParaRPr>
+                    </a:p>
+                  </a:txBody>
+                  <a:tcPr marL="0" marR="0" marT="0" marB="0"/>
+                </a:tc>
+                <a:tc>
+                  <a:txBody>
+                    <a:bodyPr/>
+                    <a:lstStyle/>
+                    <a:p>
+                      <a:pPr>
+                        <a:lnSpc>
+                          <a:spcPct val="100000"/>
+                        </a:lnSpc>
+                      </a:pPr>
                       <a:endParaRPr sz="1000">
                         <a:latin typeface="Times New Roman"/>
                         <a:cs typeface="Times New Roman"/>
@@ -8722,6 +8698,74 @@
                   </a:txBody>
                   <a:tcPr marL="0" marR="0" marT="0" marB="0"/>
                 </a:tc>
+                <a:tc gridSpan="5">
+                  <a:txBody>
+                    <a:bodyPr/>
+                    <a:lstStyle/>
+                    <a:p>
+                      <a:pPr marL="233679" marR="3175">
+                        <a:lnSpc>
+                          <a:spcPct val="100000"/>
+                        </a:lnSpc>
+                        <a:spcBef>
+                          <a:spcPts val="220"/>
+                        </a:spcBef>
+                      </a:pPr>
+                      <a:r>
+                        <a:rPr sz="1100" b="1" spc="-10" dirty="0">
+                          <a:latin typeface="MS Mincho"/>
+                          <a:cs typeface="MS Mincho"/>
+                        </a:rPr>
+                        <a:t>学歴・職歴など</a:t>
+                      </a:r>
+                      <a:endParaRPr sz="1100">
+                        <a:latin typeface="MS Mincho"/>
+                        <a:cs typeface="MS Mincho"/>
+                      </a:endParaRPr>
+                    </a:p>
+                  </a:txBody>
+                  <a:tcPr marL="0" marR="0" marT="27940" marB="0"/>
+                </a:tc>
+                <a:tc hMerge="1">
+                  <a:txBody>
+                    <a:bodyPr/>
+                    <a:lstStyle/>
+                    <a:p>
+                      <a:endParaRPr/>
+                    </a:p>
+                  </a:txBody>
+                  <a:tcPr marL="0" marR="0" marT="0" marB="0"/>
+                </a:tc>
+                <a:tc hMerge="1">
+                  <a:txBody>
+                    <a:bodyPr/>
+                    <a:lstStyle/>
+                    <a:p>
+                      <a:endParaRPr/>
+                    </a:p>
+                  </a:txBody>
+                  <a:tcPr marL="0" marR="0" marT="0" marB="0"/>
+                </a:tc>
+                <a:tc hMerge="1">
+                  <a:txBody>
+                    <a:bodyPr/>
+                    <a:lstStyle/>
+                    <a:p>
+                      <a:endParaRPr/>
+                    </a:p>
+                  </a:txBody>
+                  <a:tcPr marL="0" marR="0" marT="0" marB="0"/>
+                </a:tc>
+                <a:tc hMerge="1">
+                  <a:txBody>
+                    <a:bodyPr/>
+                    <a:lstStyle/>
+                    <a:p>
+                      <a:endParaRPr/>
+                    </a:p>
+                  </a:txBody>
+                  <a:tcPr marL="0" marR="0" marT="0" marB="0"/>
+                </a:tc>
                 <a:tc>
                   <a:txBody>
                     <a:bodyPr/>
@@ -8740,74 +8784,6 @@
                   </a:txBody>
                   <a:tcPr marL="0" marR="0" marT="0" marB="0"/>
                 </a:tc>
-                <a:tc gridSpan="5">
-                  <a:txBody>
-                    <a:bodyPr/>
-                    <a:lstStyle/>
-                    <a:p>
-                      <a:pPr marL="233679" marR="3175">
-                        <a:lnSpc>
-                          <a:spcPct val="100000"/>
-                        </a:lnSpc>
-                        <a:spcBef>
-                          <a:spcPts val="220"/>
-                        </a:spcBef>
-                      </a:pPr>
-                      <a:r>
-                        <a:rPr sz="1100" b="1" spc="-10" dirty="0">
-                          <a:latin typeface="MS Mincho"/>
-                          <a:cs typeface="MS Mincho"/>
-                        </a:rPr>
-                        <a:t>学歴・職歴など</a:t>
-                      </a:r>
-                      <a:endParaRPr sz="1100">
-                        <a:latin typeface="MS Mincho"/>
-                        <a:cs typeface="MS Mincho"/>
-                      </a:endParaRPr>
-                    </a:p>
-                  </a:txBody>
-                  <a:tcPr marL="0" marR="0" marT="27940" marB="0"/>
-                </a:tc>
-                <a:tc hMerge="1">
-                  <a:txBody>
-                    <a:bodyPr/>
-                    <a:lstStyle/>
-                    <a:p>
-                      <a:endParaRPr/>
-                    </a:p>
-                  </a:txBody>
-                  <a:tcPr marL="0" marR="0" marT="0" marB="0"/>
-                </a:tc>
-                <a:tc hMerge="1">
-                  <a:txBody>
-                    <a:bodyPr/>
-                    <a:lstStyle/>
-                    <a:p>
-                      <a:endParaRPr/>
-                    </a:p>
-                  </a:txBody>
-                  <a:tcPr marL="0" marR="0" marT="0" marB="0"/>
-                </a:tc>
-                <a:tc hMerge="1">
-                  <a:txBody>
-                    <a:bodyPr/>
-                    <a:lstStyle/>
-                    <a:p>
-                      <a:endParaRPr/>
-                    </a:p>
-                  </a:txBody>
-                  <a:tcPr marL="0" marR="0" marT="0" marB="0"/>
-                </a:tc>
-                <a:tc hMerge="1">
-                  <a:txBody>
-                    <a:bodyPr/>
-                    <a:lstStyle/>
-                    <a:p>
-                      <a:endParaRPr/>
-                    </a:p>
-                  </a:txBody>
-                  <a:tcPr marL="0" marR="0" marT="0" marB="0"/>
-                </a:tc>
                 <a:tc>
                   <a:txBody>
                     <a:bodyPr/>
@@ -8818,25 +8794,7 @@
                           <a:spcPct val="100000"/>
                         </a:lnSpc>
                       </a:pPr>
-                      <a:endParaRPr sz="1000">
-                        <a:latin typeface="Times New Roman"/>
-                        <a:cs typeface="Times New Roman"/>
-                      </a:endParaRPr>
-                    </a:p>
-                  </a:txBody>
-                  <a:tcPr marL="0" marR="0" marT="0" marB="0"/>
-                </a:tc>
-                <a:tc>
-                  <a:txBody>
-                    <a:bodyPr/>
-                    <a:lstStyle/>
-                    <a:p>
-                      <a:pPr>
-                        <a:lnSpc>
-                          <a:spcPct val="100000"/>
-                        </a:lnSpc>
-                      </a:pPr>
-                      <a:endParaRPr sz="1000">
+                      <a:endParaRPr sz="1000" dirty="0">
                         <a:latin typeface="Times New Roman"/>
                         <a:cs typeface="Times New Roman"/>
                       </a:endParaRPr>
@@ -11740,48 +11698,6 @@
           </a:p>
         </p:txBody>
       </p:sp>
-      <p:sp>
-        <p:nvSpPr>
-          <p:cNvPr id="9" name="object 9"/>
-          <p:cNvSpPr/>
-          <p:nvPr/>
-        </p:nvSpPr>
-        <p:spPr>
-          <a:xfrm>
-            <a:off x="5852921" y="3922014"/>
-            <a:ext cx="6350" cy="0"/>
-          </a:xfrm>
-          <a:custGeom>
-            <a:avLst/>
-            <a:gdLst/>
-            <a:ahLst/>
-            <a:cxnLst/>
-            <a:rect l="l" t="t" r="r" b="b"/>
-            <a:pathLst>
-              <a:path w="6350">
-                <a:moveTo>
-                  <a:pt x="0" y="0"/>
-                </a:moveTo>
-                <a:lnTo>
-                  <a:pt x="6095" y="0"/>
-                </a:lnTo>
-              </a:path>
-            </a:pathLst>
-          </a:custGeom>
-          <a:ln w="6095">
-            <a:solidFill>
-              <a:srgbClr val="000000"/>
-            </a:solidFill>
-          </a:ln>
-        </p:spPr>
-        <p:txBody>
-          <a:bodyPr wrap="square" lIns="0" tIns="0" rIns="0" bIns="0" rtlCol="0"/>
-          <a:lstStyle/>
-          <a:p>
-            <a:endParaRPr/>
-          </a:p>
-        </p:txBody>
-      </p:sp>
       <p:grpSp>
         <p:nvGrpSpPr>
           <p:cNvPr id="10" name="object 10"/>
@@ -13271,11 +13187,17 @@
           <p:cNvGraphicFramePr>
             <a:graphicFrameLocks noGrp="1"/>
           </p:cNvGraphicFramePr>
-          <p:nvPr/>
+          <p:nvPr>
+            <p:extLst>
+              <p:ext uri="{D42A27DB-BD31-4B8C-83A1-F6EECF244321}">
+                <p14:modId xmlns:p14="http://schemas.microsoft.com/office/powerpoint/2010/main" val="1189663204"/>
+              </p:ext>
+            </p:extLst>
+          </p:nvPr>
         </p:nvGraphicFramePr>
         <p:xfrm>
-          <a:off x="7693145" y="360432"/>
-          <a:ext cx="6694170" cy="9041128"/>
+          <a:off x="7693144" y="317500"/>
+          <a:ext cx="7108705" cy="9098770"/>
         </p:xfrm>
         <a:graphic>
           <a:graphicData uri="http://schemas.openxmlformats.org/drawingml/2006/table">
@@ -13284,7 +13206,7 @@
                 <a:tableStyleId>{2D5ABB26-0587-4C30-8999-92F81FD0307C}</a:tableStyleId>
               </a:tblPr>
               <a:tblGrid>
-                <a:gridCol w="6694170">
+                <a:gridCol w="7108705">
                   <a:extLst>
                     <a:ext uri="{9D8B030D-6E8A-4147-A177-3AD203B41FA5}">
                       <a16:colId xmlns:a16="http://schemas.microsoft.com/office/drawing/2014/main" val="20000"/>
@@ -13292,7 +13214,7 @@
                   </a:extLst>
                 </a:gridCol>
               </a:tblGrid>
-              <a:tr h="240665">
+              <a:tr h="241799">
                 <a:tc>
                   <a:txBody>
                     <a:bodyPr/>
@@ -13352,7 +13274,7 @@
                   </a:ext>
                 </a:extLst>
               </a:tr>
-              <a:tr h="238760">
+              <a:tr h="239885">
                 <a:tc>
                   <a:txBody>
                     <a:bodyPr/>
@@ -13472,7 +13394,7 @@
                   </a:ext>
                 </a:extLst>
               </a:tr>
-              <a:tr h="228600">
+              <a:tr h="229678">
                 <a:tc>
                   <a:txBody>
                     <a:bodyPr/>
@@ -13594,7 +13516,7 @@
                   </a:ext>
                 </a:extLst>
               </a:tr>
-              <a:tr h="229870">
+              <a:tr h="230954">
                 <a:tc>
                   <a:txBody>
                     <a:bodyPr/>
@@ -13666,7 +13588,7 @@
                   </a:ext>
                 </a:extLst>
               </a:tr>
-              <a:tr h="229235">
+              <a:tr h="230316">
                 <a:tc>
                   <a:txBody>
                     <a:bodyPr/>
@@ -13848,7 +13770,7 @@
                         </a:rPr>
                         <a:t>年</a:t>
                       </a:r>
-                      <a:endParaRPr sz="1050">
+                      <a:endParaRPr sz="1050" dirty="0">
                         <a:latin typeface="MS Mincho"/>
                         <a:cs typeface="MS Mincho"/>
                       </a:endParaRPr>
@@ -13881,7 +13803,7 @@
                   </a:ext>
                 </a:extLst>
               </a:tr>
-              <a:tr h="241300">
+              <a:tr h="242437">
                 <a:tc>
                   <a:txBody>
                     <a:bodyPr/>
@@ -13909,7 +13831,7 @@
                         </a:rPr>
                         <a:t>PR</a:t>
                       </a:r>
-                      <a:endParaRPr sz="1200">
+                      <a:endParaRPr sz="1200" dirty="0">
                         <a:latin typeface="MS Mincho"/>
                         <a:cs typeface="MS Mincho"/>
                       </a:endParaRPr>
@@ -13948,7 +13870,7 @@
                   </a:ext>
                 </a:extLst>
               </a:tr>
-              <a:tr h="234315">
+              <a:tr h="251517">
                 <a:tc>
                   <a:txBody>
                     <a:bodyPr/>
@@ -13969,7 +13891,7 @@
                         </a:rPr>
                         <a:t>私は物事に対する挑戦心と一途な事に取り組める向上意欲があります。学生時代に検定を受ける際に難しい</a:t>
                       </a:r>
-                      <a:endParaRPr sz="1050">
+                      <a:endParaRPr sz="1050" dirty="0">
                         <a:latin typeface="MS Mincho"/>
                         <a:cs typeface="MS Mincho"/>
                       </a:endParaRPr>
@@ -14023,7 +13945,7 @@
                         </a:rPr>
                         <a:t>方の検定を自ら志願し、顧問の先生に頼んで毎日残り勉強しその検定を見事取ることが出来ました。この事か</a:t>
                       </a:r>
-                      <a:endParaRPr sz="1050">
+                      <a:endParaRPr sz="1050" dirty="0">
                         <a:latin typeface="MS Mincho"/>
                         <a:cs typeface="MS Mincho"/>
                       </a:endParaRPr>
@@ -14050,7 +13972,7 @@
                   </a:ext>
                 </a:extLst>
               </a:tr>
-              <a:tr h="228600">
+              <a:tr h="229678">
                 <a:tc>
                   <a:txBody>
                     <a:bodyPr/>
@@ -14071,7 +13993,7 @@
                         </a:rPr>
                         <a:t>ら自分が出来る範囲内で手が届くのであれば失敗しても恐れず、失敗をしてもそのミスを引きずらないよう</a:t>
                       </a:r>
-                      <a:endParaRPr sz="1050">
+                      <a:endParaRPr sz="1050" dirty="0">
                         <a:latin typeface="MS Mincho"/>
                         <a:cs typeface="MS Mincho"/>
                       </a:endParaRPr>
@@ -14098,7 +14020,7 @@
                   </a:ext>
                 </a:extLst>
               </a:tr>
-              <a:tr h="228600">
+              <a:tr h="229678">
                 <a:tc>
                   <a:txBody>
                     <a:bodyPr/>
@@ -14113,13 +14035,13 @@
                         </a:spcBef>
                       </a:pPr>
                       <a:r>
-                        <a:rPr sz="1050" spc="-5" dirty="0">
-                          <a:latin typeface="MS Mincho"/>
-                          <a:cs typeface="MS Mincho"/>
-                        </a:rPr>
-                        <a:t>次の経験に活かすよう意識する事を学びました。もう一つはアルバイトであまり作業をしない事などには慣れ</a:t>
-                      </a:r>
-                      <a:endParaRPr sz="1050">
+                        <a:rPr sz="1050" spc="-5" dirty="0" err="1">
+                          <a:latin typeface="MS Mincho"/>
+                          <a:cs typeface="MS Mincho"/>
+                        </a:rPr>
+                        <a:t>経験に活かすよう意識する事を学びました。もう一つはアルバイトであまり作業をしない事などには慣れ</a:t>
+                      </a:r>
+                      <a:endParaRPr sz="1050" dirty="0">
                         <a:latin typeface="MS Mincho"/>
                         <a:cs typeface="MS Mincho"/>
                       </a:endParaRPr>
@@ -14146,7 +14068,7 @@
                   </a:ext>
                 </a:extLst>
               </a:tr>
-              <a:tr h="228600">
+              <a:tr h="229678">
                 <a:tc>
                   <a:txBody>
                     <a:bodyPr/>
@@ -14167,7 +14089,7 @@
                         </a:rPr>
                         <a:t>が無く失敗も多くありました。しかし分からなければすぐに相談をし、どのようにしたら早くなるのかなどを</a:t>
                       </a:r>
-                      <a:endParaRPr sz="1050">
+                      <a:endParaRPr sz="1050" dirty="0">
                         <a:latin typeface="MS Mincho"/>
                         <a:cs typeface="MS Mincho"/>
                       </a:endParaRPr>
@@ -14194,7 +14116,7 @@
                   </a:ext>
                 </a:extLst>
               </a:tr>
-              <a:tr h="228600">
+              <a:tr h="229678">
                 <a:tc>
                   <a:txBody>
                     <a:bodyPr/>
@@ -14249,7 +14171,7 @@
                   </a:ext>
                 </a:extLst>
               </a:tr>
-              <a:tr h="228600">
+              <a:tr h="229678">
                 <a:tc>
                   <a:txBody>
                     <a:bodyPr/>
@@ -14297,7 +14219,7 @@
                   </a:ext>
                 </a:extLst>
               </a:tr>
-              <a:tr h="1377315">
+              <a:tr h="1383807">
                 <a:tc>
                   <a:txBody>
                     <a:bodyPr/>
@@ -14318,7 +14240,7 @@
                         </a:rPr>
                         <a:t>図れて自分の成長を促せました。</a:t>
                       </a:r>
-                      <a:endParaRPr sz="1050">
+                      <a:endParaRPr sz="1050" dirty="0">
                         <a:latin typeface="MS Mincho"/>
                         <a:cs typeface="MS Mincho"/>
                       </a:endParaRPr>
@@ -14351,7 +14273,7 @@
                   </a:ext>
                 </a:extLst>
               </a:tr>
-              <a:tr h="241300">
+              <a:tr h="242437">
                 <a:tc>
                   <a:txBody>
                     <a:bodyPr/>
@@ -14411,7 +14333,7 @@
                   </a:ext>
                 </a:extLst>
               </a:tr>
-              <a:tr h="234950">
+              <a:tr h="236057">
                 <a:tc>
                   <a:txBody>
                     <a:bodyPr/>
@@ -14493,7 +14415,7 @@
                   </a:ext>
                 </a:extLst>
               </a:tr>
-              <a:tr h="240665">
+              <a:tr h="241799">
                 <a:tc>
                   <a:txBody>
                     <a:bodyPr/>
@@ -14569,7 +14491,7 @@
                   </a:ext>
                 </a:extLst>
               </a:tr>
-              <a:tr h="240665">
+              <a:tr h="241799">
                 <a:tc>
                   <a:txBody>
                     <a:bodyPr/>
@@ -14711,7 +14633,7 @@
                   </a:ext>
                 </a:extLst>
               </a:tr>
-              <a:tr h="230504">
+              <a:tr h="231591">
                 <a:tc>
                   <a:txBody>
                     <a:bodyPr/>
@@ -14773,7 +14695,7 @@
                   </a:ext>
                 </a:extLst>
               </a:tr>
-              <a:tr h="230504">
+              <a:tr h="231591">
                 <a:tc>
                   <a:txBody>
                     <a:bodyPr/>
@@ -14835,7 +14757,7 @@
                   </a:ext>
                 </a:extLst>
               </a:tr>
-              <a:tr h="228600">
+              <a:tr h="229678">
                 <a:tc>
                   <a:txBody>
                     <a:bodyPr/>
@@ -14925,7 +14847,7 @@
                   </a:ext>
                 </a:extLst>
               </a:tr>
-              <a:tr h="228600">
+              <a:tr h="229678">
                 <a:tc>
                   <a:txBody>
                     <a:bodyPr/>
@@ -15088,7 +15010,7 @@
                   </a:ext>
                 </a:extLst>
               </a:tr>
-              <a:tr h="228600">
+              <a:tr h="229678">
                 <a:tc>
                   <a:txBody>
                     <a:bodyPr/>
@@ -15188,7 +15110,7 @@
                   </a:ext>
                 </a:extLst>
               </a:tr>
-              <a:tr h="228600">
+              <a:tr h="229678">
                 <a:tc>
                   <a:txBody>
                     <a:bodyPr/>
@@ -15250,7 +15172,7 @@
                   </a:ext>
                 </a:extLst>
               </a:tr>
-              <a:tr h="228600">
+              <a:tr h="229678">
                 <a:tc>
                   <a:txBody>
                     <a:bodyPr/>
@@ -15326,7 +15248,7 @@
                   </a:ext>
                 </a:extLst>
               </a:tr>
-              <a:tr h="228600">
+              <a:tr h="229678">
                 <a:tc>
                   <a:txBody>
                     <a:bodyPr/>
@@ -15374,7 +15296,7 @@
                   </a:ext>
                 </a:extLst>
               </a:tr>
-              <a:tr h="228600">
+              <a:tr h="229678">
                 <a:tc>
                   <a:txBody>
                     <a:bodyPr/>
@@ -15450,7 +15372,7 @@
                   </a:ext>
                 </a:extLst>
               </a:tr>
-              <a:tr h="228600">
+              <a:tr h="229678">
                 <a:tc>
                   <a:txBody>
                     <a:bodyPr/>
@@ -15519,7 +15441,7 @@
                   </a:ext>
                 </a:extLst>
               </a:tr>
-              <a:tr h="228600">
+              <a:tr h="229678">
                 <a:tc>
                   <a:txBody>
                     <a:bodyPr/>
@@ -15567,7 +15489,7 @@
                   </a:ext>
                 </a:extLst>
               </a:tr>
-              <a:tr h="228600">
+              <a:tr h="229678">
                 <a:tc>
                   <a:txBody>
                     <a:bodyPr/>
@@ -15615,7 +15537,7 @@
                   </a:ext>
                 </a:extLst>
               </a:tr>
-              <a:tr h="234315">
+              <a:tr h="235419">
                 <a:tc>
                   <a:txBody>
                     <a:bodyPr/>
@@ -15669,7 +15591,7 @@
                   </a:ext>
                 </a:extLst>
               </a:tr>
-              <a:tr h="241300">
+              <a:tr h="242437">
                 <a:tc>
                   <a:txBody>
                     <a:bodyPr/>
@@ -15729,7 +15651,7 @@
                   </a:ext>
                 </a:extLst>
               </a:tr>
-              <a:tr h="237490">
+              <a:tr h="238609">
                 <a:tc>
                   <a:txBody>
                     <a:bodyPr/>
@@ -15836,7 +15758,7 @@
                   </a:ext>
                 </a:extLst>
               </a:tr>
-              <a:tr h="231775">
+              <a:tr h="232868">
                 <a:tc>
                   <a:txBody>
                     <a:bodyPr/>
@@ -15857,7 +15779,7 @@
                         </a:rPr>
                         <a:t>集中力が短く長い話を聞くのがとても苦手なのでゆっくり何度も丁寧に教えてもらえるとありがたいです。</a:t>
                       </a:r>
-                      <a:endParaRPr sz="1050">
+                      <a:endParaRPr sz="1050" dirty="0">
                         <a:latin typeface="Yu Mincho"/>
                         <a:cs typeface="Yu Mincho"/>
                       </a:endParaRPr>
@@ -15908,14 +15830,91 @@
         </p:blipFill>
         <p:spPr>
           <a:xfrm>
-            <a:off x="5499290" y="477202"/>
-            <a:ext cx="1325943" cy="2023744"/>
+            <a:off x="5335015" y="477201"/>
+            <a:ext cx="1588389" cy="2090737"/>
           </a:xfrm>
           <a:prstGeom prst="rect">
             <a:avLst/>
           </a:prstGeom>
         </p:spPr>
       </p:pic>
+      <p:sp>
+        <p:nvSpPr>
+          <p:cNvPr id="34" name="Day">
+            <a:extLst>
+              <a:ext uri="{FF2B5EF4-FFF2-40B4-BE49-F238E27FC236}">
+                <a16:creationId xmlns:a16="http://schemas.microsoft.com/office/drawing/2014/main" id="{F394B0A1-E467-4A6D-AA54-AA8E18879250}"/>
+              </a:ext>
+            </a:extLst>
+          </p:cNvPr>
+          <p:cNvSpPr txBox="1"/>
+          <p:nvPr/>
+        </p:nvSpPr>
+        <p:spPr>
+          <a:xfrm>
+            <a:off x="3040547" y="938194"/>
+            <a:ext cx="1909597" cy="276999"/>
+          </a:xfrm>
+          <a:prstGeom prst="rect">
+            <a:avLst/>
+          </a:prstGeom>
+          <a:noFill/>
+        </p:spPr>
+        <p:txBody>
+          <a:bodyPr wrap="square" rtlCol="0">
+            <a:spAutoFit/>
+          </a:bodyPr>
+          <a:lstStyle/>
+          <a:p>
+            <a:r>
+              <a:rPr kumimoji="1" lang="en-US" altLang="zh-TW" sz="1200" dirty="0">
+                <a:latin typeface="ＭＳ 明朝" panose="02020609040205080304" pitchFamily="17" charset="-128"/>
+                <a:ea typeface="ＭＳ 明朝" panose="02020609040205080304" pitchFamily="17" charset="-128"/>
+              </a:rPr>
+              <a:t>2025</a:t>
+            </a:r>
+            <a:r>
+              <a:rPr kumimoji="1" lang="zh-TW" altLang="en-US" sz="1200" dirty="0">
+                <a:latin typeface="ＭＳ 明朝" panose="02020609040205080304" pitchFamily="17" charset="-128"/>
+                <a:ea typeface="ＭＳ 明朝" panose="02020609040205080304" pitchFamily="17" charset="-128"/>
+              </a:rPr>
+              <a:t>年</a:t>
+            </a:r>
+            <a:r>
+              <a:rPr kumimoji="1" lang="en-US" altLang="zh-TW" sz="1200" dirty="0">
+                <a:latin typeface="ＭＳ 明朝" panose="02020609040205080304" pitchFamily="17" charset="-128"/>
+                <a:ea typeface="ＭＳ 明朝" panose="02020609040205080304" pitchFamily="17" charset="-128"/>
+              </a:rPr>
+              <a:t>10</a:t>
+            </a:r>
+            <a:r>
+              <a:rPr kumimoji="1" lang="zh-TW" altLang="en-US" sz="1200" dirty="0">
+                <a:latin typeface="ＭＳ 明朝" panose="02020609040205080304" pitchFamily="17" charset="-128"/>
+                <a:ea typeface="ＭＳ 明朝" panose="02020609040205080304" pitchFamily="17" charset="-128"/>
+              </a:rPr>
+              <a:t>月</a:t>
+            </a:r>
+            <a:r>
+              <a:rPr kumimoji="1" lang="en-US" altLang="zh-TW" sz="1200" dirty="0">
+                <a:latin typeface="ＭＳ 明朝" panose="02020609040205080304" pitchFamily="17" charset="-128"/>
+                <a:ea typeface="ＭＳ 明朝" panose="02020609040205080304" pitchFamily="17" charset="-128"/>
+              </a:rPr>
+              <a:t>07</a:t>
+            </a:r>
+            <a:r>
+              <a:rPr kumimoji="1" lang="zh-TW" altLang="en-US" sz="1200" dirty="0">
+                <a:latin typeface="ＭＳ 明朝" panose="02020609040205080304" pitchFamily="17" charset="-128"/>
+                <a:ea typeface="ＭＳ 明朝" panose="02020609040205080304" pitchFamily="17" charset="-128"/>
+              </a:rPr>
+              <a:t>日現在</a:t>
+            </a:r>
+            <a:endParaRPr kumimoji="1" lang="ja-JP" altLang="en-US" sz="1200" dirty="0">
+              <a:latin typeface="ＭＳ 明朝" panose="02020609040205080304" pitchFamily="17" charset="-128"/>
+              <a:ea typeface="ＭＳ 明朝" panose="02020609040205080304" pitchFamily="17" charset="-128"/>
+            </a:endParaRPr>
+          </a:p>
+        </p:txBody>
+      </p:sp>
     </p:spTree>
   </p:cSld>
   <p:clrMapOvr>
